--- a/assets/pptx/catalog-402.pptx
+++ b/assets/pptx/catalog-402.pptx
@@ -3547,7 +3547,7 @@
                 <a:ea typeface="Ebrima"/>
                 <a:cs typeface="Ebrima"/>
               </a:rPr>
-              <a:t>ምናሳየው አንተን ነው ምናሳየው (x2)</a:t>
+              <a:t>ምናሳየው አንተን ነው ምናሳየው x2</a:t>
             </a:r>
           </a:p>
         </p:txBody>
@@ -4242,7 +4242,7 @@
                 <a:ea typeface="Ebrima"/>
                 <a:cs typeface="Ebrima"/>
               </a:rPr>
-              <a:t>እናመልክሃለን (x5)</a:t>
+              <a:t>እናመልክሃለን x5</a:t>
             </a:r>
           </a:p>
           <a:p>
@@ -4448,7 +4448,7 @@
                 <a:ea typeface="Ebrima"/>
                 <a:cs typeface="Ebrima"/>
               </a:rPr>
-              <a:t>ክበር ክበር ክበር (x3)</a:t>
+              <a:t>ክበር ክበር ክበር x3</a:t>
             </a:r>
           </a:p>
         </p:txBody>
